--- a/results/presentation_With_LLM.pptx
+++ b/results/presentation_With_LLM.pptx
@@ -274,14 +274,69 @@
       </c:catAx>
       <c:valAx>
         <c:axId val="-2113994440"/>
-        <c:scaling/>
-        <c:delete/>
+        <c:scaling>
+          <c:max val="100.0"/>
+          <c:min val="0.0"/>
+        </c:scaling>
+        <c:delete val="0"/>
         <c:axPos val="b"/>
+        <c:majorGridlines>
+          <c:spPr>
+            <a:ln w="3175">
+              <a:solidFill>
+                <a:srgbClr val="E5E7EB"/>
+              </a:solidFill>
+            </a:ln>
+          </c:spPr>
+        </c:majorGridlines>
+        <c:title>
+          <c:tx>
+            <c:rich>
+              <a:bodyPr/>
+              <a:lstStyle/>
+              <a:p>
+                <a:pPr>
+                  <a:defRPr sz="1100" b="0">
+                    <a:solidFill>
+                      <a:srgbClr val="6B7280"/>
+                    </a:solidFill>
+                    <a:latin typeface="Calibri"/>
+                  </a:defRPr>
+                </a:pPr>
+                <a:r>
+                  <a:t>%</a:t>
+                </a:r>
+              </a:p>
+            </c:rich>
+          </c:tx>
+          <c:layout/>
+          <c:overlay val="0"/>
+        </c:title>
         <c:majorTickMark val="out"/>
         <c:minorTickMark val="none"/>
         <c:tickLblPos val="nextTo"/>
+        <c:spPr>
+          <a:ln>
+            <a:noFill/>
+          </a:ln>
+        </c:spPr>
+        <c:txPr>
+          <a:bodyPr/>
+          <a:lstStyle/>
+          <a:p>
+            <a:pPr>
+              <a:defRPr sz="1100">
+                <a:solidFill>
+                  <a:srgbClr val="6B7280"/>
+                </a:solidFill>
+                <a:latin typeface="Calibri"/>
+              </a:defRPr>
+            </a:pPr>
+          </a:p>
+        </c:txPr>
         <c:crossAx val="-2068027336"/>
         <c:crosses val="autoZero"/>
+        <c:majorUnit val="25.0"/>
       </c:valAx>
     </c:plotArea>
     <c:dispBlanksAs val="gap"/>
@@ -478,14 +533,69 @@
       </c:catAx>
       <c:valAx>
         <c:axId val="-2113994440"/>
-        <c:scaling/>
-        <c:delete/>
+        <c:scaling>
+          <c:max val="100.0"/>
+          <c:min val="0.0"/>
+        </c:scaling>
+        <c:delete val="0"/>
         <c:axPos val="b"/>
+        <c:majorGridlines>
+          <c:spPr>
+            <a:ln w="3175">
+              <a:solidFill>
+                <a:srgbClr val="E5E7EB"/>
+              </a:solidFill>
+            </a:ln>
+          </c:spPr>
+        </c:majorGridlines>
+        <c:title>
+          <c:tx>
+            <c:rich>
+              <a:bodyPr/>
+              <a:lstStyle/>
+              <a:p>
+                <a:pPr>
+                  <a:defRPr sz="1100" b="0">
+                    <a:solidFill>
+                      <a:srgbClr val="6B7280"/>
+                    </a:solidFill>
+                    <a:latin typeface="Calibri"/>
+                  </a:defRPr>
+                </a:pPr>
+                <a:r>
+                  <a:t>%</a:t>
+                </a:r>
+              </a:p>
+            </c:rich>
+          </c:tx>
+          <c:layout/>
+          <c:overlay val="0"/>
+        </c:title>
         <c:majorTickMark val="out"/>
         <c:minorTickMark val="none"/>
         <c:tickLblPos val="nextTo"/>
+        <c:spPr>
+          <a:ln>
+            <a:noFill/>
+          </a:ln>
+        </c:spPr>
+        <c:txPr>
+          <a:bodyPr/>
+          <a:lstStyle/>
+          <a:p>
+            <a:pPr>
+              <a:defRPr sz="1100">
+                <a:solidFill>
+                  <a:srgbClr val="6B7280"/>
+                </a:solidFill>
+                <a:latin typeface="Calibri"/>
+              </a:defRPr>
+            </a:pPr>
+          </a:p>
+        </c:txPr>
         <c:crossAx val="-2068027336"/>
         <c:crosses val="autoZero"/>
+        <c:majorUnit val="25.0"/>
       </c:valAx>
     </c:plotArea>
     <c:dispBlanksAs val="gap"/>
@@ -752,14 +862,69 @@
       </c:catAx>
       <c:valAx>
         <c:axId val="-2113994440"/>
-        <c:scaling/>
-        <c:delete/>
+        <c:scaling>
+          <c:max val="100.0"/>
+          <c:min val="0.0"/>
+        </c:scaling>
+        <c:delete val="0"/>
         <c:axPos val="b"/>
+        <c:majorGridlines>
+          <c:spPr>
+            <a:ln w="3175">
+              <a:solidFill>
+                <a:srgbClr val="E5E7EB"/>
+              </a:solidFill>
+            </a:ln>
+          </c:spPr>
+        </c:majorGridlines>
+        <c:title>
+          <c:tx>
+            <c:rich>
+              <a:bodyPr/>
+              <a:lstStyle/>
+              <a:p>
+                <a:pPr>
+                  <a:defRPr sz="1100" b="0">
+                    <a:solidFill>
+                      <a:srgbClr val="6B7280"/>
+                    </a:solidFill>
+                    <a:latin typeface="Calibri"/>
+                  </a:defRPr>
+                </a:pPr>
+                <a:r>
+                  <a:t>%</a:t>
+                </a:r>
+              </a:p>
+            </c:rich>
+          </c:tx>
+          <c:layout/>
+          <c:overlay val="0"/>
+        </c:title>
         <c:majorTickMark val="out"/>
         <c:minorTickMark val="none"/>
         <c:tickLblPos val="nextTo"/>
+        <c:spPr>
+          <a:ln>
+            <a:noFill/>
+          </a:ln>
+        </c:spPr>
+        <c:txPr>
+          <a:bodyPr/>
+          <a:lstStyle/>
+          <a:p>
+            <a:pPr>
+              <a:defRPr sz="1100">
+                <a:solidFill>
+                  <a:srgbClr val="6B7280"/>
+                </a:solidFill>
+                <a:latin typeface="Calibri"/>
+              </a:defRPr>
+            </a:pPr>
+          </a:p>
+        </c:txPr>
         <c:crossAx val="-2068027336"/>
         <c:crosses val="autoZero"/>
+        <c:majorUnit val="25.0"/>
       </c:valAx>
     </c:plotArea>
     <c:dispBlanksAs val="gap"/>
@@ -3792,7 +3957,7 @@
               </a:defRPr>
             </a:pPr>
             <a:r>
-              <a:t>Gen Z Purchase Behavior in the U.S.</a:t>
+              <a:t>Gen Z Purchase Behavior in the US</a:t>
             </a:r>
           </a:p>
         </p:txBody>
@@ -3828,7 +3993,7 @@
               </a:defRPr>
             </a:pPr>
             <a:r>
-              <a:t>An Analytical Report on Digital Influence, Retail Expectations, and Brand Preferences</a:t>
+              <a:t>Key Drivers, Brand Affinity, and Retail Expectations</a:t>
             </a:r>
           </a:p>
         </p:txBody>
@@ -3864,7 +4029,7 @@
               </a:defRPr>
             </a:pPr>
             <a:r>
-              <a:t>Gen Z Purchase Behavior in the U.S.  |  1 / 6</a:t>
+              <a:t>Gen Z Purchase Behavior in the US  |  1 / 6</a:t>
             </a:r>
           </a:p>
         </p:txBody>
@@ -3918,7 +4083,7 @@
               </a:defRPr>
             </a:pPr>
             <a:r>
-              <a:t>Executive Summary: Key Purchase Drivers</a:t>
+              <a:t>Gen Z Consumer Behavior Highlights</a:t>
             </a:r>
           </a:p>
         </p:txBody>
@@ -3997,7 +4162,7 @@
               </a:defRPr>
             </a:pPr>
             <a:r>
-              <a:t>Digital social channels and hands-on product experiences define Gen Z commercial habits.</a:t>
+              <a:t>Digital influence and product experience drive Gen Z purchase decisions.</a:t>
             </a:r>
           </a:p>
         </p:txBody>
@@ -4357,7 +4522,7 @@
               </a:defRPr>
             </a:pPr>
             <a:r>
-              <a:t>In-Store Fitting</a:t>
+              <a:t>In-Store Try-On</a:t>
             </a:r>
           </a:p>
         </p:txBody>
@@ -4393,7 +4558,7 @@
               </a:defRPr>
             </a:pPr>
             <a:r>
-              <a:t>Essential in fashion</a:t>
+              <a:t>Essential for fashion shopping</a:t>
             </a:r>
           </a:p>
         </p:txBody>
@@ -4591,7 +4756,7 @@
               </a:defRPr>
             </a:pPr>
             <a:r>
-              <a:t>Have a favorite brand</a:t>
+              <a:t>Prefer a favorite brand</a:t>
             </a:r>
           </a:p>
         </p:txBody>
@@ -4753,7 +4918,7 @@
               </a:defRPr>
             </a:pPr>
             <a:r>
-              <a:t>Top Brand Share</a:t>
+              <a:t>Top Brand Index</a:t>
             </a:r>
           </a:p>
         </p:txBody>
@@ -4789,7 +4954,7 @@
               </a:defRPr>
             </a:pPr>
             <a:r>
-              <a:t>The Ordinary (#1)</a:t>
+              <a:t>The Ordinary (#1 index)</a:t>
             </a:r>
           </a:p>
         </p:txBody>
@@ -4825,7 +4990,7 @@
               </a:defRPr>
             </a:pPr>
             <a:r>
-              <a:t>Source: Statista Consumer Insights &amp; Partner Research, 2024–2025</a:t>
+              <a:t>Source: Statista Consumer Insights, GoDaddy, Numerator (2024–2025)</a:t>
             </a:r>
           </a:p>
         </p:txBody>
@@ -4861,7 +5026,7 @@
               </a:defRPr>
             </a:pPr>
             <a:r>
-              <a:t>Gen Z Purchase Behavior in the U.S.  |  2 / 6</a:t>
+              <a:t>Gen Z Purchase Behavior in the US  |  2 / 6</a:t>
             </a:r>
           </a:p>
         </p:txBody>
@@ -4915,7 +5080,7 @@
               </a:defRPr>
             </a:pPr>
             <a:r>
-              <a:t>Digital Impulses Drive Purchase Decisions</a:t>
+              <a:t>Digital Impulses &amp; Purchase Influences</a:t>
             </a:r>
           </a:p>
         </p:txBody>
@@ -4994,7 +5159,7 @@
               </a:defRPr>
             </a:pPr>
             <a:r>
-              <a:t>Influencer posts and brand social channels are the primary triggers for Gen Z buying.</a:t>
+              <a:t>Influencer content and direct brand social posts drive primary purchase behavior.</a:t>
             </a:r>
           </a:p>
         </p:txBody>
@@ -5048,7 +5213,7 @@
               </a:defRPr>
             </a:pPr>
             <a:r>
-              <a:t>Source: Actions influencing Gen Zers' purchase decisions in the United States in 2025, GoDaddy, October 2024</a:t>
+              <a:t>Source: GoDaddy, October 2024</a:t>
             </a:r>
           </a:p>
         </p:txBody>
@@ -5084,7 +5249,7 @@
               </a:defRPr>
             </a:pPr>
             <a:r>
-              <a:t>Gen Z Purchase Behavior in the U.S.  |  3 / 6</a:t>
+              <a:t>Gen Z Purchase Behavior in the US  |  3 / 6</a:t>
             </a:r>
           </a:p>
         </p:txBody>
@@ -5138,7 +5303,7 @@
               </a:defRPr>
             </a:pPr>
             <a:r>
-              <a:t>Product Experience Shapes Apparel Choices</a:t>
+              <a:t>Fashion Preferences &amp; Buying Criteria</a:t>
             </a:r>
           </a:p>
         </p:txBody>
@@ -5217,7 +5382,7 @@
               </a:defRPr>
             </a:pPr>
             <a:r>
-              <a:t>Despite digital habits, physical fit remains critical for apparel conversion.</a:t>
+              <a:t>Physical product evaluation remains essential despite high digital engagement.</a:t>
             </a:r>
           </a:p>
         </p:txBody>
@@ -5271,7 +5436,7 @@
               </a:defRPr>
             </a:pPr>
             <a:r>
-              <a:t>Source: Gen Z attitudes toward fashion in the United States in 2025, Statista Consumer Insights, December 2025</a:t>
+              <a:t>Source: Statista Consumer Insights, December 2025</a:t>
             </a:r>
           </a:p>
         </p:txBody>
@@ -5307,7 +5472,7 @@
               </a:defRPr>
             </a:pPr>
             <a:r>
-              <a:t>Gen Z Purchase Behavior in the U.S.  |  4 / 6</a:t>
+              <a:t>Gen Z Purchase Behavior in the US  |  4 / 6</a:t>
             </a:r>
           </a:p>
         </p:txBody>
@@ -5361,7 +5526,7 @@
               </a:defRPr>
             </a:pPr>
             <a:r>
-              <a:t>Beauty &amp; Skincare Dominate Brand Rankings</a:t>
+              <a:t>Most Popular Brands Among Gen Z</a:t>
             </a:r>
           </a:p>
         </p:txBody>
@@ -5440,7 +5605,7 @@
               </a:defRPr>
             </a:pPr>
             <a:r>
-              <a:t>Skincare and cosmetics brands lead disproportionately among Gen Z consumers.</a:t>
+              <a:t>Skincare and beauty brands dominate Gen Z brand preferences.</a:t>
             </a:r>
           </a:p>
         </p:txBody>
@@ -5494,7 +5659,7 @@
               </a:defRPr>
             </a:pPr>
             <a:r>
-              <a:t>Source: Most popular brands among Generation Z in the United States in 2025, Numerator, August 2025</a:t>
+              <a:t>Source: Numerator, August 2025</a:t>
             </a:r>
           </a:p>
         </p:txBody>
@@ -5530,7 +5695,7 @@
               </a:defRPr>
             </a:pPr>
             <a:r>
-              <a:t>Gen Z Purchase Behavior in the U.S.  |  5 / 6</a:t>
+              <a:t>Gen Z Purchase Behavior in the US  |  5 / 6</a:t>
             </a:r>
           </a:p>
         </p:txBody>
@@ -5663,7 +5828,7 @@
               </a:defRPr>
             </a:pPr>
             <a:r>
-              <a:t>Brands must connect social discovery with authentic product experience.</a:t>
+              <a:t>Winning Gen Z requires creator engagement paired with tactile product experiences.</a:t>
             </a:r>
           </a:p>
         </p:txBody>
@@ -5735,7 +5900,7 @@
               </a:defRPr>
             </a:pPr>
             <a:r>
-              <a:t>Prioritize creator partnerships and active brand channels to capture digital intent.</a:t>
+              <a:t>Prioritize creator and brand social channels to trigger top-of-funnel discovery</a:t>
             </a:r>
           </a:p>
         </p:txBody>
@@ -5851,7 +6016,7 @@
               </a:defRPr>
             </a:pPr>
             <a:r>
-              <a:t>Maintain physical touchpoints and flexible return policies to satisfy trial needs.</a:t>
+              <a:t>Maintain physical try-on and fit experiences in fashion retail strategies</a:t>
             </a:r>
           </a:p>
         </p:txBody>
@@ -5967,7 +6132,7 @@
               </a:defRPr>
             </a:pPr>
             <a:r>
-              <a:t>Position value and product efficacy at the core of messaging, particularly in personal care.</a:t>
+              <a:t>Capitalize on high brand affinity in beauty through authentic product positioning</a:t>
             </a:r>
           </a:p>
         </p:txBody>
@@ -6003,7 +6168,7 @@
               </a:defRPr>
             </a:pPr>
             <a:r>
-              <a:t>Source: Statista Research &amp; Analysis, 2025</a:t>
+              <a:t>Source: Statista Synthesis, 2025</a:t>
             </a:r>
           </a:p>
         </p:txBody>
@@ -6039,7 +6204,7 @@
               </a:defRPr>
             </a:pPr>
             <a:r>
-              <a:t>Note: Methodology based on 3 independent Statista surveys (~10,600 respondents total, US, 2024–2025). The GoDaddy survey was published Oct 2024 referencing 2025 data, serving as forward-looking projections.</a:t>
+              <a:t>Note: Based on three independent Statista surveys (~10,600+ total US respondents, 2024–2025). Note: GoDaddy survey published Oct 2024 references 2025 figures, representing forward-looking consumer projections.</a:t>
             </a:r>
           </a:p>
         </p:txBody>
@@ -6075,7 +6240,7 @@
               </a:defRPr>
             </a:pPr>
             <a:r>
-              <a:t>Gen Z Purchase Behavior in the U.S.  |  6 / 6</a:t>
+              <a:t>Gen Z Purchase Behavior in the US  |  6 / 6</a:t>
             </a:r>
           </a:p>
         </p:txBody>
